--- a/stry prompt vp.pptx
+++ b/stry prompt vp.pptx
@@ -12,8 +12,9 @@
     <p:sldId id="260" r:id="rId6"/>
     <p:sldId id="261" r:id="rId7"/>
     <p:sldId id="264" r:id="rId8"/>
-    <p:sldId id="263" r:id="rId9"/>
-    <p:sldId id="265" r:id="rId10"/>
+    <p:sldId id="266" r:id="rId9"/>
+    <p:sldId id="263" r:id="rId10"/>
+    <p:sldId id="265" r:id="rId11"/>
   </p:sldIdLst>
   <p:sldSz cx="12188825" cy="6858000"/>
   <p:notesSz cx="6858000" cy="9144000"/>
@@ -134,9 +135,352 @@
 <file path=ppt/revisionInfo.xml><?xml version="1.0" encoding="utf-8"?>
 <p1510:revInfo xmlns:a="http://schemas.openxmlformats.org/drawingml/2006/main" xmlns:r="http://schemas.openxmlformats.org/officeDocument/2006/relationships" xmlns:p1510="http://schemas.microsoft.com/office/powerpoint/2015/10/main">
   <p1510:revLst>
+    <p1510:client id="{B2879FF8-DE2D-4C3C-8DEC-8FDC32FB0B96}" v="8" dt="2026-06-24T06:31:55.685"/>
     <p1510:client id="{F02C4287-5271-4119-8BCE-DB269E917BCB}" v="1" dt="2026-06-24T06:08:02.210"/>
   </p1510:revLst>
 </p1510:revInfo>
+</file>
+
+<file path=ppt/changesInfos/changesInfo1.xml><?xml version="1.0" encoding="utf-8"?>
+<pc:chgInfo xmlns:a="http://schemas.openxmlformats.org/drawingml/2006/main" xmlns:r="http://schemas.openxmlformats.org/officeDocument/2006/relationships" xmlns:ac="http://schemas.microsoft.com/office/drawing/2013/main/command" xmlns:pc="http://schemas.microsoft.com/office/powerpoint/2013/main/command">
+  <pc:docChgLst>
+    <pc:chgData name="Vaishnavi Panchal" userId="3ffd4c63ac6ab703" providerId="LiveId" clId="{41A13C3D-B72E-4478-BCDC-91BB987370F2}"/>
+    <pc:docChg chg="undo custSel addSld modSld">
+      <pc:chgData name="Vaishnavi Panchal" userId="3ffd4c63ac6ab703" providerId="LiveId" clId="{41A13C3D-B72E-4478-BCDC-91BB987370F2}" dt="2026-06-24T06:43:43.263" v="131" actId="20577"/>
+      <pc:docMkLst>
+        <pc:docMk/>
+      </pc:docMkLst>
+      <pc:sldChg chg="addSp delSp modSp mod">
+        <pc:chgData name="Vaishnavi Panchal" userId="3ffd4c63ac6ab703" providerId="LiveId" clId="{41A13C3D-B72E-4478-BCDC-91BB987370F2}" dt="2026-06-24T06:25:25.716" v="35" actId="1076"/>
+        <pc:sldMkLst>
+          <pc:docMk/>
+          <pc:sldMk cId="0" sldId="256"/>
+        </pc:sldMkLst>
+        <pc:spChg chg="mod">
+          <ac:chgData name="Vaishnavi Panchal" userId="3ffd4c63ac6ab703" providerId="LiveId" clId="{41A13C3D-B72E-4478-BCDC-91BB987370F2}" dt="2026-06-24T06:25:21.313" v="34" actId="14100"/>
+          <ac:spMkLst>
+            <pc:docMk/>
+            <pc:sldMk cId="0" sldId="256"/>
+            <ac:spMk id="6" creationId="{00000000-0000-0000-0000-000000000000}"/>
+          </ac:spMkLst>
+        </pc:spChg>
+        <pc:spChg chg="mod">
+          <ac:chgData name="Vaishnavi Panchal" userId="3ffd4c63ac6ab703" providerId="LiveId" clId="{41A13C3D-B72E-4478-BCDC-91BB987370F2}" dt="2026-06-24T06:23:48.060" v="10" actId="14100"/>
+          <ac:spMkLst>
+            <pc:docMk/>
+            <pc:sldMk cId="0" sldId="256"/>
+            <ac:spMk id="7" creationId="{00000000-0000-0000-0000-000000000000}"/>
+          </ac:spMkLst>
+        </pc:spChg>
+        <pc:spChg chg="add del">
+          <ac:chgData name="Vaishnavi Panchal" userId="3ffd4c63ac6ab703" providerId="LiveId" clId="{41A13C3D-B72E-4478-BCDC-91BB987370F2}" dt="2026-06-24T06:23:52.433" v="12" actId="21"/>
+          <ac:spMkLst>
+            <pc:docMk/>
+            <pc:sldMk cId="0" sldId="256"/>
+            <ac:spMk id="8" creationId="{00000000-0000-0000-0000-000000000000}"/>
+          </ac:spMkLst>
+        </pc:spChg>
+        <pc:spChg chg="add del">
+          <ac:chgData name="Vaishnavi Panchal" userId="3ffd4c63ac6ab703" providerId="LiveId" clId="{41A13C3D-B72E-4478-BCDC-91BB987370F2}" dt="2026-06-24T06:23:59.437" v="14" actId="21"/>
+          <ac:spMkLst>
+            <pc:docMk/>
+            <pc:sldMk cId="0" sldId="256"/>
+            <ac:spMk id="10" creationId="{5DB04050-E509-8DC1-3321-0AA5E01F0E6E}"/>
+          </ac:spMkLst>
+        </pc:spChg>
+        <pc:picChg chg="add mod">
+          <ac:chgData name="Vaishnavi Panchal" userId="3ffd4c63ac6ab703" providerId="LiveId" clId="{41A13C3D-B72E-4478-BCDC-91BB987370F2}" dt="2026-06-24T06:25:25.716" v="35" actId="1076"/>
+          <ac:picMkLst>
+            <pc:docMk/>
+            <pc:sldMk cId="0" sldId="256"/>
+            <ac:picMk id="11" creationId="{E786FA9D-8FB7-D35D-182F-30CF00AF663A}"/>
+          </ac:picMkLst>
+        </pc:picChg>
+      </pc:sldChg>
+      <pc:sldChg chg="addSp delSp modSp mod">
+        <pc:chgData name="Vaishnavi Panchal" userId="3ffd4c63ac6ab703" providerId="LiveId" clId="{41A13C3D-B72E-4478-BCDC-91BB987370F2}" dt="2026-06-24T06:26:17.812" v="40" actId="1076"/>
+        <pc:sldMkLst>
+          <pc:docMk/>
+          <pc:sldMk cId="0" sldId="257"/>
+        </pc:sldMkLst>
+        <pc:spChg chg="add del">
+          <ac:chgData name="Vaishnavi Panchal" userId="3ffd4c63ac6ab703" providerId="LiveId" clId="{41A13C3D-B72E-4478-BCDC-91BB987370F2}" dt="2026-06-24T06:25:34.017" v="36" actId="21"/>
+          <ac:spMkLst>
+            <pc:docMk/>
+            <pc:sldMk cId="0" sldId="257"/>
+            <ac:spMk id="8" creationId="{00000000-0000-0000-0000-000000000000}"/>
+          </ac:spMkLst>
+        </pc:spChg>
+        <pc:picChg chg="add mod">
+          <ac:chgData name="Vaishnavi Panchal" userId="3ffd4c63ac6ab703" providerId="LiveId" clId="{41A13C3D-B72E-4478-BCDC-91BB987370F2}" dt="2026-06-24T06:26:17.812" v="40" actId="1076"/>
+          <ac:picMkLst>
+            <pc:docMk/>
+            <pc:sldMk cId="0" sldId="257"/>
+            <ac:picMk id="9" creationId="{F7FB291A-D2F6-2CA4-6F20-E13931C8D3E5}"/>
+          </ac:picMkLst>
+        </pc:picChg>
+      </pc:sldChg>
+      <pc:sldChg chg="addSp delSp modSp mod">
+        <pc:chgData name="Vaishnavi Panchal" userId="3ffd4c63ac6ab703" providerId="LiveId" clId="{41A13C3D-B72E-4478-BCDC-91BB987370F2}" dt="2026-06-24T06:29:09.766" v="58" actId="1076"/>
+        <pc:sldMkLst>
+          <pc:docMk/>
+          <pc:sldMk cId="0" sldId="258"/>
+        </pc:sldMkLst>
+        <pc:spChg chg="mod">
+          <ac:chgData name="Vaishnavi Panchal" userId="3ffd4c63ac6ab703" providerId="LiveId" clId="{41A13C3D-B72E-4478-BCDC-91BB987370F2}" dt="2026-06-24T06:28:28.470" v="54"/>
+          <ac:spMkLst>
+            <pc:docMk/>
+            <pc:sldMk cId="0" sldId="258"/>
+            <ac:spMk id="6" creationId="{00000000-0000-0000-0000-000000000000}"/>
+          </ac:spMkLst>
+        </pc:spChg>
+        <pc:spChg chg="mod">
+          <ac:chgData name="Vaishnavi Panchal" userId="3ffd4c63ac6ab703" providerId="LiveId" clId="{41A13C3D-B72E-4478-BCDC-91BB987370F2}" dt="2026-06-24T06:27:10.045" v="46" actId="14100"/>
+          <ac:spMkLst>
+            <pc:docMk/>
+            <pc:sldMk cId="0" sldId="258"/>
+            <ac:spMk id="7" creationId="{00000000-0000-0000-0000-000000000000}"/>
+          </ac:spMkLst>
+        </pc:spChg>
+        <pc:spChg chg="del">
+          <ac:chgData name="Vaishnavi Panchal" userId="3ffd4c63ac6ab703" providerId="LiveId" clId="{41A13C3D-B72E-4478-BCDC-91BB987370F2}" dt="2026-06-24T06:26:28.018" v="41" actId="21"/>
+          <ac:spMkLst>
+            <pc:docMk/>
+            <pc:sldMk cId="0" sldId="258"/>
+            <ac:spMk id="8" creationId="{00000000-0000-0000-0000-000000000000}"/>
+          </ac:spMkLst>
+        </pc:spChg>
+        <pc:picChg chg="add mod">
+          <ac:chgData name="Vaishnavi Panchal" userId="3ffd4c63ac6ab703" providerId="LiveId" clId="{41A13C3D-B72E-4478-BCDC-91BB987370F2}" dt="2026-06-24T06:27:53.819" v="52" actId="1076"/>
+          <ac:picMkLst>
+            <pc:docMk/>
+            <pc:sldMk cId="0" sldId="258"/>
+            <ac:picMk id="9" creationId="{316FEA96-30AB-7C52-FB78-40F8C93F8175}"/>
+          </ac:picMkLst>
+        </pc:picChg>
+        <pc:picChg chg="add mod">
+          <ac:chgData name="Vaishnavi Panchal" userId="3ffd4c63ac6ab703" providerId="LiveId" clId="{41A13C3D-B72E-4478-BCDC-91BB987370F2}" dt="2026-06-24T06:29:09.766" v="58" actId="1076"/>
+          <ac:picMkLst>
+            <pc:docMk/>
+            <pc:sldMk cId="0" sldId="258"/>
+            <ac:picMk id="10" creationId="{7DC36873-4805-AB31-2028-C941FFC2AA0A}"/>
+          </ac:picMkLst>
+        </pc:picChg>
+      </pc:sldChg>
+      <pc:sldChg chg="addSp delSp modSp mod">
+        <pc:chgData name="Vaishnavi Panchal" userId="3ffd4c63ac6ab703" providerId="LiveId" clId="{41A13C3D-B72E-4478-BCDC-91BB987370F2}" dt="2026-06-24T06:30:19.578" v="64" actId="1076"/>
+        <pc:sldMkLst>
+          <pc:docMk/>
+          <pc:sldMk cId="0" sldId="259"/>
+        </pc:sldMkLst>
+        <pc:spChg chg="mod">
+          <ac:chgData name="Vaishnavi Panchal" userId="3ffd4c63ac6ab703" providerId="LiveId" clId="{41A13C3D-B72E-4478-BCDC-91BB987370F2}" dt="2026-06-24T06:30:13.884" v="63" actId="14100"/>
+          <ac:spMkLst>
+            <pc:docMk/>
+            <pc:sldMk cId="0" sldId="259"/>
+            <ac:spMk id="6" creationId="{00000000-0000-0000-0000-000000000000}"/>
+          </ac:spMkLst>
+        </pc:spChg>
+        <pc:spChg chg="del">
+          <ac:chgData name="Vaishnavi Panchal" userId="3ffd4c63ac6ab703" providerId="LiveId" clId="{41A13C3D-B72E-4478-BCDC-91BB987370F2}" dt="2026-06-24T06:29:18.073" v="59" actId="21"/>
+          <ac:spMkLst>
+            <pc:docMk/>
+            <pc:sldMk cId="0" sldId="259"/>
+            <ac:spMk id="8" creationId="{00000000-0000-0000-0000-000000000000}"/>
+          </ac:spMkLst>
+        </pc:spChg>
+        <pc:picChg chg="add mod">
+          <ac:chgData name="Vaishnavi Panchal" userId="3ffd4c63ac6ab703" providerId="LiveId" clId="{41A13C3D-B72E-4478-BCDC-91BB987370F2}" dt="2026-06-24T06:30:19.578" v="64" actId="1076"/>
+          <ac:picMkLst>
+            <pc:docMk/>
+            <pc:sldMk cId="0" sldId="259"/>
+            <ac:picMk id="9" creationId="{28EA0A28-CF7F-EA20-54F6-CBAB13E67176}"/>
+          </ac:picMkLst>
+        </pc:picChg>
+      </pc:sldChg>
+      <pc:sldChg chg="addSp delSp modSp mod">
+        <pc:chgData name="Vaishnavi Panchal" userId="3ffd4c63ac6ab703" providerId="LiveId" clId="{41A13C3D-B72E-4478-BCDC-91BB987370F2}" dt="2026-06-24T06:32:07.355" v="80" actId="1076"/>
+        <pc:sldMkLst>
+          <pc:docMk/>
+          <pc:sldMk cId="0" sldId="260"/>
+        </pc:sldMkLst>
+        <pc:spChg chg="del mod">
+          <ac:chgData name="Vaishnavi Panchal" userId="3ffd4c63ac6ab703" providerId="LiveId" clId="{41A13C3D-B72E-4478-BCDC-91BB987370F2}" dt="2026-06-24T06:31:13.686" v="70" actId="21"/>
+          <ac:spMkLst>
+            <pc:docMk/>
+            <pc:sldMk cId="0" sldId="260"/>
+            <ac:spMk id="6" creationId="{00000000-0000-0000-0000-000000000000}"/>
+          </ac:spMkLst>
+        </pc:spChg>
+        <pc:spChg chg="del">
+          <ac:chgData name="Vaishnavi Panchal" userId="3ffd4c63ac6ab703" providerId="LiveId" clId="{41A13C3D-B72E-4478-BCDC-91BB987370F2}" dt="2026-06-24T06:30:51.983" v="65" actId="21"/>
+          <ac:spMkLst>
+            <pc:docMk/>
+            <pc:sldMk cId="0" sldId="260"/>
+            <ac:spMk id="8" creationId="{00000000-0000-0000-0000-000000000000}"/>
+          </ac:spMkLst>
+        </pc:spChg>
+        <pc:spChg chg="add del">
+          <ac:chgData name="Vaishnavi Panchal" userId="3ffd4c63ac6ab703" providerId="LiveId" clId="{41A13C3D-B72E-4478-BCDC-91BB987370F2}" dt="2026-06-24T06:30:59.704" v="67" actId="21"/>
+          <ac:spMkLst>
+            <pc:docMk/>
+            <pc:sldMk cId="0" sldId="260"/>
+            <ac:spMk id="10" creationId="{8D2EE232-AA6F-41F2-8029-365319FFF181}"/>
+          </ac:spMkLst>
+        </pc:spChg>
+        <pc:spChg chg="add del">
+          <ac:chgData name="Vaishnavi Panchal" userId="3ffd4c63ac6ab703" providerId="LiveId" clId="{41A13C3D-B72E-4478-BCDC-91BB987370F2}" dt="2026-06-24T06:31:13.686" v="70" actId="21"/>
+          <ac:spMkLst>
+            <pc:docMk/>
+            <pc:sldMk cId="0" sldId="260"/>
+            <ac:spMk id="12" creationId="{5F0F10D8-87F4-DF21-35C2-729BE57B2298}"/>
+          </ac:spMkLst>
+        </pc:spChg>
+        <pc:picChg chg="add mod">
+          <ac:chgData name="Vaishnavi Panchal" userId="3ffd4c63ac6ab703" providerId="LiveId" clId="{41A13C3D-B72E-4478-BCDC-91BB987370F2}" dt="2026-06-24T06:32:07.355" v="80" actId="1076"/>
+          <ac:picMkLst>
+            <pc:docMk/>
+            <pc:sldMk cId="0" sldId="260"/>
+            <ac:picMk id="13" creationId="{CE614E04-ADF1-5DF8-35CE-E5776F1CAB8F}"/>
+          </ac:picMkLst>
+        </pc:picChg>
+        <pc:picChg chg="add mod">
+          <ac:chgData name="Vaishnavi Panchal" userId="3ffd4c63ac6ab703" providerId="LiveId" clId="{41A13C3D-B72E-4478-BCDC-91BB987370F2}" dt="2026-06-24T06:32:05.035" v="79" actId="1076"/>
+          <ac:picMkLst>
+            <pc:docMk/>
+            <pc:sldMk cId="0" sldId="260"/>
+            <ac:picMk id="14" creationId="{95C8AF95-2706-B885-A4AC-DE466BDD43BE}"/>
+          </ac:picMkLst>
+        </pc:picChg>
+      </pc:sldChg>
+      <pc:sldChg chg="delSp modSp mod">
+        <pc:chgData name="Vaishnavi Panchal" userId="3ffd4c63ac6ab703" providerId="LiveId" clId="{41A13C3D-B72E-4478-BCDC-91BB987370F2}" dt="2026-06-24T06:32:35.973" v="90" actId="20577"/>
+        <pc:sldMkLst>
+          <pc:docMk/>
+          <pc:sldMk cId="0" sldId="261"/>
+        </pc:sldMkLst>
+        <pc:spChg chg="mod">
+          <ac:chgData name="Vaishnavi Panchal" userId="3ffd4c63ac6ab703" providerId="LiveId" clId="{41A13C3D-B72E-4478-BCDC-91BB987370F2}" dt="2026-06-24T06:32:21.534" v="82" actId="14100"/>
+          <ac:spMkLst>
+            <pc:docMk/>
+            <pc:sldMk cId="0" sldId="261"/>
+            <ac:spMk id="6" creationId="{00000000-0000-0000-0000-000000000000}"/>
+          </ac:spMkLst>
+        </pc:spChg>
+        <pc:spChg chg="mod">
+          <ac:chgData name="Vaishnavi Panchal" userId="3ffd4c63ac6ab703" providerId="LiveId" clId="{41A13C3D-B72E-4478-BCDC-91BB987370F2}" dt="2026-06-24T06:32:35.973" v="90" actId="20577"/>
+          <ac:spMkLst>
+            <pc:docMk/>
+            <pc:sldMk cId="0" sldId="261"/>
+            <ac:spMk id="7" creationId="{00000000-0000-0000-0000-000000000000}"/>
+          </ac:spMkLst>
+        </pc:spChg>
+        <pc:spChg chg="del">
+          <ac:chgData name="Vaishnavi Panchal" userId="3ffd4c63ac6ab703" providerId="LiveId" clId="{41A13C3D-B72E-4478-BCDC-91BB987370F2}" dt="2026-06-24T06:32:16.482" v="81" actId="21"/>
+          <ac:spMkLst>
+            <pc:docMk/>
+            <pc:sldMk cId="0" sldId="261"/>
+            <ac:spMk id="8" creationId="{00000000-0000-0000-0000-000000000000}"/>
+          </ac:spMkLst>
+        </pc:spChg>
+        <pc:picChg chg="mod">
+          <ac:chgData name="Vaishnavi Panchal" userId="3ffd4c63ac6ab703" providerId="LiveId" clId="{41A13C3D-B72E-4478-BCDC-91BB987370F2}" dt="2026-06-24T06:32:30.516" v="85" actId="14100"/>
+          <ac:picMkLst>
+            <pc:docMk/>
+            <pc:sldMk cId="0" sldId="261"/>
+            <ac:picMk id="12" creationId="{CC5EA63D-45D1-6C9B-8719-C85B69C12B76}"/>
+          </ac:picMkLst>
+        </pc:picChg>
+      </pc:sldChg>
+      <pc:sldChg chg="delSp modSp mod">
+        <pc:chgData name="Vaishnavi Panchal" userId="3ffd4c63ac6ab703" providerId="LiveId" clId="{41A13C3D-B72E-4478-BCDC-91BB987370F2}" dt="2026-06-24T06:38:04.316" v="92" actId="14100"/>
+        <pc:sldMkLst>
+          <pc:docMk/>
+          <pc:sldMk cId="0" sldId="263"/>
+        </pc:sldMkLst>
+        <pc:spChg chg="mod">
+          <ac:chgData name="Vaishnavi Panchal" userId="3ffd4c63ac6ab703" providerId="LiveId" clId="{41A13C3D-B72E-4478-BCDC-91BB987370F2}" dt="2026-06-24T06:38:04.316" v="92" actId="14100"/>
+          <ac:spMkLst>
+            <pc:docMk/>
+            <pc:sldMk cId="0" sldId="263"/>
+            <ac:spMk id="6" creationId="{00000000-0000-0000-0000-000000000000}"/>
+          </ac:spMkLst>
+        </pc:spChg>
+        <pc:spChg chg="del">
+          <ac:chgData name="Vaishnavi Panchal" userId="3ffd4c63ac6ab703" providerId="LiveId" clId="{41A13C3D-B72E-4478-BCDC-91BB987370F2}" dt="2026-06-24T06:32:54.262" v="91" actId="21"/>
+          <ac:spMkLst>
+            <pc:docMk/>
+            <pc:sldMk cId="0" sldId="263"/>
+            <ac:spMk id="8" creationId="{00000000-0000-0000-0000-000000000000}"/>
+          </ac:spMkLst>
+        </pc:spChg>
+      </pc:sldChg>
+      <pc:sldChg chg="addSp delSp modSp new mod">
+        <pc:chgData name="Vaishnavi Panchal" userId="3ffd4c63ac6ab703" providerId="LiveId" clId="{41A13C3D-B72E-4478-BCDC-91BB987370F2}" dt="2026-06-24T06:43:43.263" v="131" actId="20577"/>
+        <pc:sldMkLst>
+          <pc:docMk/>
+          <pc:sldMk cId="1957461987" sldId="266"/>
+        </pc:sldMkLst>
+        <pc:spChg chg="add del">
+          <ac:chgData name="Vaishnavi Panchal" userId="3ffd4c63ac6ab703" providerId="LiveId" clId="{41A13C3D-B72E-4478-BCDC-91BB987370F2}" dt="2026-06-24T06:39:43.128" v="110" actId="21"/>
+          <ac:spMkLst>
+            <pc:docMk/>
+            <pc:sldMk cId="1957461987" sldId="266"/>
+            <ac:spMk id="5" creationId="{661A433E-7875-AB73-B6FF-EDADD6F2B2DC}"/>
+          </ac:spMkLst>
+        </pc:spChg>
+        <pc:spChg chg="add del mod">
+          <ac:chgData name="Vaishnavi Panchal" userId="3ffd4c63ac6ab703" providerId="LiveId" clId="{41A13C3D-B72E-4478-BCDC-91BB987370F2}" dt="2026-06-24T06:40:47.920" v="115" actId="14100"/>
+          <ac:spMkLst>
+            <pc:docMk/>
+            <pc:sldMk cId="1957461987" sldId="266"/>
+            <ac:spMk id="7" creationId="{1716A845-5864-5D08-EFD9-D1263C6C2C28}"/>
+          </ac:spMkLst>
+        </pc:spChg>
+        <pc:spChg chg="add mod">
+          <ac:chgData name="Vaishnavi Panchal" userId="3ffd4c63ac6ab703" providerId="LiveId" clId="{41A13C3D-B72E-4478-BCDC-91BB987370F2}" dt="2026-06-24T06:40:59.390" v="116" actId="255"/>
+          <ac:spMkLst>
+            <pc:docMk/>
+            <pc:sldMk cId="1957461987" sldId="266"/>
+            <ac:spMk id="9" creationId="{EB954678-25D5-5CD1-1A68-EDA21E8B9D5C}"/>
+          </ac:spMkLst>
+        </pc:spChg>
+        <pc:spChg chg="add mod">
+          <ac:chgData name="Vaishnavi Panchal" userId="3ffd4c63ac6ab703" providerId="LiveId" clId="{41A13C3D-B72E-4478-BCDC-91BB987370F2}" dt="2026-06-24T06:42:53.804" v="128" actId="14100"/>
+          <ac:spMkLst>
+            <pc:docMk/>
+            <pc:sldMk cId="1957461987" sldId="266"/>
+            <ac:spMk id="13" creationId="{9CD57912-21BE-A03E-2FE9-7D641CC7D75A}"/>
+          </ac:spMkLst>
+        </pc:spChg>
+        <pc:spChg chg="add mod">
+          <ac:chgData name="Vaishnavi Panchal" userId="3ffd4c63ac6ab703" providerId="LiveId" clId="{41A13C3D-B72E-4478-BCDC-91BB987370F2}" dt="2026-06-24T06:43:43.263" v="131" actId="20577"/>
+          <ac:spMkLst>
+            <pc:docMk/>
+            <pc:sldMk cId="1957461987" sldId="266"/>
+            <ac:spMk id="15" creationId="{C710D4E8-A5F5-9AF8-6A9D-2D978214A430}"/>
+          </ac:spMkLst>
+        </pc:spChg>
+        <pc:picChg chg="add del mod">
+          <ac:chgData name="Vaishnavi Panchal" userId="3ffd4c63ac6ab703" providerId="LiveId" clId="{41A13C3D-B72E-4478-BCDC-91BB987370F2}" dt="2026-06-24T06:21:29.982" v="3" actId="21"/>
+          <ac:picMkLst>
+            <pc:docMk/>
+            <pc:sldMk cId="1957461987" sldId="266"/>
+            <ac:picMk id="3" creationId="{199ACC75-E3DE-74AD-9943-7136A6DCC501}"/>
+          </ac:picMkLst>
+        </pc:picChg>
+        <pc:picChg chg="add mod">
+          <ac:chgData name="Vaishnavi Panchal" userId="3ffd4c63ac6ab703" providerId="LiveId" clId="{41A13C3D-B72E-4478-BCDC-91BB987370F2}" dt="2026-06-24T06:42:19.946" v="124" actId="1076"/>
+          <ac:picMkLst>
+            <pc:docMk/>
+            <pc:sldMk cId="1957461987" sldId="266"/>
+            <ac:picMk id="11" creationId="{9736CAC5-B88D-447C-C08F-582EAF93D066}"/>
+          </ac:picMkLst>
+        </pc:picChg>
+      </pc:sldChg>
+    </pc:docChg>
+  </pc:docChgLst>
+</pc:chgInfo>
 </file>
 
 <file path=ppt/slideLayouts/slideLayout1.xml><?xml version="1.0" encoding="utf-8"?>
@@ -3290,7 +3634,7 @@
         <p:spPr>
           <a:xfrm>
             <a:off x="548640" y="914400"/>
-            <a:ext cx="7680960" cy="5303520"/>
+            <a:ext cx="11640312" cy="5303520"/>
           </a:xfrm>
           <a:prstGeom prst="roundRect">
             <a:avLst/>
@@ -3323,7 +3667,7 @@
           <a:lstStyle/>
           <a:p>
             <a:pPr algn="ctr"/>
-            <a:endParaRPr/>
+            <a:endParaRPr dirty="0"/>
           </a:p>
         </p:txBody>
       </p:sp>
@@ -3336,7 +3680,7 @@
         <p:spPr>
           <a:xfrm>
             <a:off x="822960" y="1143000"/>
-            <a:ext cx="7132320" cy="4754880"/>
+            <a:ext cx="7132320" cy="1061829"/>
           </a:xfrm>
           <a:prstGeom prst="rect">
             <a:avLst/>
@@ -3386,73 +3730,103 @@
           </a:p>
         </p:txBody>
       </p:sp>
-      <p:sp>
-        <p:nvSpPr>
-          <p:cNvPr id="8" name="Rounded Rectangle 7"/>
-          <p:cNvSpPr/>
+      <p:pic>
+        <p:nvPicPr>
+          <p:cNvPr id="11" name="Picture 10" descr="https://images.openai.com/static-rsc-4/L_k0xA21ukDEQP15KNw9PE1nz2KqknSqqrkDZpHo-402Z-Cau79yPVR1dz47UDi9warLoSEXs3TLEBlr3Pv_bKL2eGFhFVvLHeOmR0peS0ZvxR6wPoDImikb8vPKZQd7D9jMYf3-vKJrDC3mRLzd1tsS2ORQrIyC221QO0NPK65w4Hi_QyTS-_vpaUHL3sV_?purpose=fullsize">
+            <a:extLst>
+              <a:ext uri="{FF2B5EF4-FFF2-40B4-BE49-F238E27FC236}">
+                <a16:creationId xmlns:a16="http://schemas.microsoft.com/office/drawing/2014/main" id="{E786FA9D-8FB7-D35D-182F-30CF00AF663A}"/>
+              </a:ext>
+            </a:extLst>
+          </p:cNvPr>
+          <p:cNvPicPr>
+            <a:picLocks noChangeAspect="1"/>
+          </p:cNvPicPr>
           <p:nvPr/>
-        </p:nvSpPr>
-        <p:spPr>
-          <a:xfrm>
-            <a:off x="8686800" y="1097280"/>
-            <a:ext cx="2743200" cy="4754880"/>
-          </a:xfrm>
-          <a:prstGeom prst="roundRect">
+        </p:nvPicPr>
+        <p:blipFill>
+          <a:blip r:embed="rId2"/>
+          <a:stretch>
+            <a:fillRect/>
+          </a:stretch>
+        </p:blipFill>
+        <p:spPr>
+          <a:xfrm>
+            <a:off x="6585187" y="1506661"/>
+            <a:ext cx="4873451" cy="4150561"/>
+          </a:xfrm>
+          <a:prstGeom prst="rect">
             <a:avLst/>
           </a:prstGeom>
-          <a:solidFill>
-            <a:srgbClr val="EC4899"/>
-          </a:solidFill>
-          <a:ln>
-            <a:noFill/>
-          </a:ln>
-        </p:spPr>
-        <p:style>
-          <a:lnRef idx="1">
-            <a:schemeClr val="accent1"/>
-          </a:lnRef>
-          <a:fillRef idx="3">
-            <a:schemeClr val="accent1"/>
-          </a:fillRef>
-          <a:effectRef idx="2">
-            <a:schemeClr val="accent1"/>
-          </a:effectRef>
-          <a:fontRef idx="minor">
-            <a:schemeClr val="lt1"/>
-          </a:fontRef>
-        </p:style>
-        <p:txBody>
-          <a:bodyPr rtlCol="0" anchor="ctr"/>
-          <a:lstStyle/>
-          <a:p>
-            <a:pPr algn="ctr">
-              <a:defRPr sz="3400"/>
-            </a:pPr>
-            <a:r>
-              <a:t>🤖</a:t>
-            </a:r>
-            <a:br/>
-            <a:endParaRPr/>
-          </a:p>
-          <a:p>
-            <a:pPr algn="ctr">
-              <a:defRPr sz="2000">
-                <a:solidFill>
-                  <a:srgbClr val="FFFFFF"/>
-                </a:solidFill>
-              </a:defRPr>
-            </a:pPr>
-            <a:r>
-              <a:t>Canva-style</a:t>
-            </a:r>
-            <a:br/>
-            <a:r>
-              <a:t>visual area</a:t>
-            </a:r>
-          </a:p>
-        </p:txBody>
-      </p:sp>
+        </p:spPr>
+      </p:pic>
     </p:spTree>
+  </p:cSld>
+  <p:clrMapOvr>
+    <a:masterClrMapping/>
+  </p:clrMapOvr>
+</p:sld>
+</file>
+
+<file path=ppt/slides/slide10.xml><?xml version="1.0" encoding="utf-8"?>
+<p:sld xmlns:a="http://schemas.openxmlformats.org/drawingml/2006/main" xmlns:r="http://schemas.openxmlformats.org/officeDocument/2006/relationships" xmlns:p="http://schemas.openxmlformats.org/presentationml/2006/main">
+  <p:cSld>
+    <p:spTree>
+      <p:nvGrpSpPr>
+        <p:cNvPr id="1" name=""/>
+        <p:cNvGrpSpPr/>
+        <p:nvPr/>
+      </p:nvGrpSpPr>
+      <p:grpSpPr>
+        <a:xfrm>
+          <a:off x="0" y="0"/>
+          <a:ext cx="0" cy="0"/>
+          <a:chOff x="0" y="0"/>
+          <a:chExt cx="0" cy="0"/>
+        </a:xfrm>
+      </p:grpSpPr>
+      <p:pic>
+        <p:nvPicPr>
+          <p:cNvPr id="3" name="Picture 2">
+            <a:extLst>
+              <a:ext uri="{FF2B5EF4-FFF2-40B4-BE49-F238E27FC236}">
+                <a16:creationId xmlns:a16="http://schemas.microsoft.com/office/drawing/2014/main" id="{ACCAABB1-512A-55D8-85AD-A84F02C3E481}"/>
+              </a:ext>
+            </a:extLst>
+          </p:cNvPr>
+          <p:cNvPicPr>
+            <a:picLocks noChangeAspect="1"/>
+          </p:cNvPicPr>
+          <p:nvPr/>
+        </p:nvPicPr>
+        <p:blipFill>
+          <a:blip r:embed="rId2">
+            <a:extLst>
+              <a:ext uri="{837473B0-CC2E-450A-ABE3-18F120FF3D39}">
+                <a1611:picAttrSrcUrl xmlns:a1611="http://schemas.microsoft.com/office/drawing/2016/11/main" r:id="rId3"/>
+              </a:ext>
+            </a:extLst>
+          </a:blip>
+          <a:stretch>
+            <a:fillRect/>
+          </a:stretch>
+        </p:blipFill>
+        <p:spPr>
+          <a:xfrm>
+            <a:off x="950912" y="0"/>
+            <a:ext cx="10287000" cy="6858000"/>
+          </a:xfrm>
+          <a:prstGeom prst="rect">
+            <a:avLst/>
+          </a:prstGeom>
+        </p:spPr>
+      </p:pic>
+    </p:spTree>
+    <p:extLst>
+      <p:ext uri="{BB962C8B-B14F-4D97-AF65-F5344CB8AC3E}">
+        <p14:creationId xmlns:p14="http://schemas.microsoft.com/office/powerpoint/2010/main" val="1219376980"/>
+      </p:ext>
+    </p:extLst>
   </p:cSld>
   <p:clrMapOvr>
     <a:masterClrMapping/>
@@ -3755,72 +4129,36 @@
           </a:p>
         </p:txBody>
       </p:sp>
-      <p:sp>
-        <p:nvSpPr>
-          <p:cNvPr id="8" name="Rounded Rectangle 7"/>
-          <p:cNvSpPr/>
+      <p:pic>
+        <p:nvPicPr>
+          <p:cNvPr id="9" name="Picture 8" descr="https://images.openai.com/static-rsc-4/ch9WdjJcNm15G-jYiCb70Uctj6NLemZ65XPeC4aIDRjVOpf6UXrYKIMfbugjFlcEvrm2w4ATi1TgWIauWWOa9nutOxVExGy_Ep60R56GCeJyHUVYn2hFfFYoo4Jy0YsoU3kGKK5a5PZ8Sw13VdkZdG2SRZuLh8_fH0Bgay42GuuhAFzH_5avTyQ6zuvWksVG?purpose=fullsize">
+            <a:extLst>
+              <a:ext uri="{FF2B5EF4-FFF2-40B4-BE49-F238E27FC236}">
+                <a16:creationId xmlns:a16="http://schemas.microsoft.com/office/drawing/2014/main" id="{F7FB291A-D2F6-2CA4-6F20-E13931C8D3E5}"/>
+              </a:ext>
+            </a:extLst>
+          </p:cNvPr>
+          <p:cNvPicPr>
+            <a:picLocks noChangeAspect="1"/>
+          </p:cNvPicPr>
           <p:nvPr/>
-        </p:nvSpPr>
-        <p:spPr>
-          <a:xfrm>
-            <a:off x="8686800" y="1097280"/>
-            <a:ext cx="2743200" cy="4754880"/>
-          </a:xfrm>
-          <a:prstGeom prst="roundRect">
+        </p:nvPicPr>
+        <p:blipFill>
+          <a:blip r:embed="rId2"/>
+          <a:stretch>
+            <a:fillRect/>
+          </a:stretch>
+        </p:blipFill>
+        <p:spPr>
+          <a:xfrm>
+            <a:off x="8229600" y="1668252"/>
+            <a:ext cx="3592809" cy="3129625"/>
+          </a:xfrm>
+          <a:prstGeom prst="rect">
             <a:avLst/>
           </a:prstGeom>
-          <a:solidFill>
-            <a:srgbClr val="10B981"/>
-          </a:solidFill>
-          <a:ln>
-            <a:noFill/>
-          </a:ln>
-        </p:spPr>
-        <p:style>
-          <a:lnRef idx="1">
-            <a:schemeClr val="accent1"/>
-          </a:lnRef>
-          <a:fillRef idx="3">
-            <a:schemeClr val="accent1"/>
-          </a:fillRef>
-          <a:effectRef idx="2">
-            <a:schemeClr val="accent1"/>
-          </a:effectRef>
-          <a:fontRef idx="minor">
-            <a:schemeClr val="lt1"/>
-          </a:fontRef>
-        </p:style>
-        <p:txBody>
-          <a:bodyPr rtlCol="0" anchor="ctr"/>
-          <a:lstStyle/>
-          <a:p>
-            <a:pPr algn="ctr">
-              <a:defRPr sz="3400"/>
-            </a:pPr>
-            <a:r>
-              <a:t>💡</a:t>
-            </a:r>
-            <a:br/>
-            <a:endParaRPr/>
-          </a:p>
-          <a:p>
-            <a:pPr algn="ctr">
-              <a:defRPr sz="2000">
-                <a:solidFill>
-                  <a:srgbClr val="FFFFFF"/>
-                </a:solidFill>
-              </a:defRPr>
-            </a:pPr>
-            <a:r>
-              <a:t>Canva-style</a:t>
-            </a:r>
-            <a:br/>
-            <a:r>
-              <a:t>visual area</a:t>
-            </a:r>
-          </a:p>
-        </p:txBody>
-      </p:sp>
+        </p:spPr>
+      </p:pic>
     </p:spTree>
   </p:cSld>
   <p:clrMapOvr>
@@ -4029,8 +4367,8 @@
         </p:nvSpPr>
         <p:spPr>
           <a:xfrm>
-            <a:off x="548640" y="914400"/>
-            <a:ext cx="7680960" cy="5303520"/>
+            <a:off x="548639" y="594360"/>
+            <a:ext cx="11489285" cy="5623560"/>
           </a:xfrm>
           <a:prstGeom prst="roundRect">
             <a:avLst/>
@@ -4063,7 +4401,53 @@
           <a:lstStyle/>
           <a:p>
             <a:pPr algn="ctr"/>
-            <a:endParaRPr/>
+            <a:r>
+              <a:rPr lang="en-US"/>
+              <a:t>User</a:t>
+            </a:r>
+          </a:p>
+          <a:p>
+            <a:pPr algn="ctr"/>
+            <a:r>
+              <a:rPr lang="en-US"/>
+              <a:t>   ↓</a:t>
+            </a:r>
+          </a:p>
+          <a:p>
+            <a:pPr algn="ctr"/>
+            <a:r>
+              <a:rPr lang="en-US"/>
+              <a:t>Genre + Theme + Character</a:t>
+            </a:r>
+          </a:p>
+          <a:p>
+            <a:pPr algn="ctr"/>
+            <a:r>
+              <a:rPr lang="en-US"/>
+              <a:t>   ↓</a:t>
+            </a:r>
+          </a:p>
+          <a:p>
+            <a:pPr algn="ctr"/>
+            <a:r>
+              <a:rPr lang="en-US"/>
+              <a:t>AI Prompt</a:t>
+            </a:r>
+          </a:p>
+          <a:p>
+            <a:pPr algn="ctr"/>
+            <a:r>
+              <a:rPr lang="en-US"/>
+              <a:t>   ↓</a:t>
+            </a:r>
+          </a:p>
+          <a:p>
+            <a:pPr algn="ctr"/>
+            <a:r>
+              <a:rPr lang="en-US"/>
+              <a:t>Creative Story</a:t>
+            </a:r>
+            <a:endParaRPr dirty="0"/>
           </a:p>
         </p:txBody>
       </p:sp>
@@ -4076,7 +4460,7 @@
         <p:spPr>
           <a:xfrm>
             <a:off x="822960" y="1143000"/>
-            <a:ext cx="7132320" cy="4754880"/>
+            <a:ext cx="6763545" cy="3323987"/>
           </a:xfrm>
           <a:prstGeom prst="rect">
             <a:avLst/>
@@ -4208,72 +4592,66 @@
           </a:p>
         </p:txBody>
       </p:sp>
-      <p:sp>
-        <p:nvSpPr>
-          <p:cNvPr id="8" name="Rounded Rectangle 7"/>
-          <p:cNvSpPr/>
+      <p:pic>
+        <p:nvPicPr>
+          <p:cNvPr id="9" name="Picture 8" descr="https://images.openai.com/static-rsc-4/qcSIflT7bzXulxR6e72la0dLTIKOEB_p2Akgz9vH8fmPw1JjDcLPkdp9jqAXuZAjrIMPFkEL2Y2zW4S5Kqlp3d9fprevXSBxreVc0bOGbEiuEyn4uFJCFYtyy36dPiKOkQlBPxjZUIk5oH7vDN2v-V-vXnkUS-_mWJoF9ChvORd6J-J6WCVuMrVODEusJHk8?purpose=fullsize">
+            <a:extLst>
+              <a:ext uri="{FF2B5EF4-FFF2-40B4-BE49-F238E27FC236}">
+                <a16:creationId xmlns:a16="http://schemas.microsoft.com/office/drawing/2014/main" id="{316FEA96-30AB-7C52-FB78-40F8C93F8175}"/>
+              </a:ext>
+            </a:extLst>
+          </p:cNvPr>
+          <p:cNvPicPr>
+            <a:picLocks noChangeAspect="1"/>
+          </p:cNvPicPr>
           <p:nvPr/>
-        </p:nvSpPr>
-        <p:spPr>
-          <a:xfrm>
-            <a:off x="8686800" y="1097280"/>
-            <a:ext cx="2743200" cy="4754880"/>
-          </a:xfrm>
-          <a:prstGeom prst="roundRect">
+        </p:nvPicPr>
+        <p:blipFill>
+          <a:blip r:embed="rId2"/>
+          <a:stretch>
+            <a:fillRect/>
+          </a:stretch>
+        </p:blipFill>
+        <p:spPr>
+          <a:xfrm>
+            <a:off x="6879604" y="914400"/>
+            <a:ext cx="4230356" cy="2220937"/>
+          </a:xfrm>
+          <a:prstGeom prst="rect">
             <a:avLst/>
           </a:prstGeom>
-          <a:solidFill>
-            <a:srgbClr val="5856D6"/>
-          </a:solidFill>
-          <a:ln>
-            <a:noFill/>
-          </a:ln>
-        </p:spPr>
-        <p:style>
-          <a:lnRef idx="1">
-            <a:schemeClr val="accent1"/>
-          </a:lnRef>
-          <a:fillRef idx="3">
-            <a:schemeClr val="accent1"/>
-          </a:fillRef>
-          <a:effectRef idx="2">
-            <a:schemeClr val="accent1"/>
-          </a:effectRef>
-          <a:fontRef idx="minor">
-            <a:schemeClr val="lt1"/>
-          </a:fontRef>
-        </p:style>
-        <p:txBody>
-          <a:bodyPr rtlCol="0" anchor="ctr"/>
-          <a:lstStyle/>
-          <a:p>
-            <a:pPr algn="ctr">
-              <a:defRPr sz="3400"/>
-            </a:pPr>
-            <a:r>
-              <a:t>🧩</a:t>
-            </a:r>
-            <a:br/>
-            <a:endParaRPr/>
-          </a:p>
-          <a:p>
-            <a:pPr algn="ctr">
-              <a:defRPr sz="2000">
-                <a:solidFill>
-                  <a:srgbClr val="FFFFFF"/>
-                </a:solidFill>
-              </a:defRPr>
-            </a:pPr>
-            <a:r>
-              <a:t>Canva-style</a:t>
-            </a:r>
-            <a:br/>
-            <a:r>
-              <a:t>visual area</a:t>
-            </a:r>
-          </a:p>
-        </p:txBody>
-      </p:sp>
+        </p:spPr>
+      </p:pic>
+      <p:pic>
+        <p:nvPicPr>
+          <p:cNvPr id="10" name="Picture 9" descr="What Is Prompt Engineering?">
+            <a:extLst>
+              <a:ext uri="{FF2B5EF4-FFF2-40B4-BE49-F238E27FC236}">
+                <a16:creationId xmlns:a16="http://schemas.microsoft.com/office/drawing/2014/main" id="{7DC36873-4805-AB31-2028-C941FFC2AA0A}"/>
+              </a:ext>
+            </a:extLst>
+          </p:cNvPr>
+          <p:cNvPicPr>
+            <a:picLocks noChangeAspect="1"/>
+          </p:cNvPicPr>
+          <p:nvPr/>
+        </p:nvPicPr>
+        <p:blipFill>
+          <a:blip r:embed="rId3"/>
+          <a:stretch>
+            <a:fillRect/>
+          </a:stretch>
+        </p:blipFill>
+        <p:spPr>
+          <a:xfrm>
+            <a:off x="6957435" y="3511521"/>
+            <a:ext cx="4074693" cy="2330215"/>
+          </a:xfrm>
+          <a:prstGeom prst="rect">
+            <a:avLst/>
+          </a:prstGeom>
+        </p:spPr>
+      </p:pic>
     </p:spTree>
   </p:cSld>
   <p:clrMapOvr>
@@ -4482,8 +4860,8 @@
         </p:nvSpPr>
         <p:spPr>
           <a:xfrm>
-            <a:off x="548640" y="914400"/>
-            <a:ext cx="7680960" cy="5303520"/>
+            <a:off x="548640" y="822960"/>
+            <a:ext cx="11640312" cy="5394960"/>
           </a:xfrm>
           <a:prstGeom prst="roundRect">
             <a:avLst/>
@@ -4615,72 +4993,36 @@
           </a:p>
         </p:txBody>
       </p:sp>
-      <p:sp>
-        <p:nvSpPr>
-          <p:cNvPr id="8" name="Rounded Rectangle 7"/>
-          <p:cNvSpPr/>
+      <p:pic>
+        <p:nvPicPr>
+          <p:cNvPr id="9" name="Picture 8" descr="AI tools help close the gap between creative ideas and finished work">
+            <a:extLst>
+              <a:ext uri="{FF2B5EF4-FFF2-40B4-BE49-F238E27FC236}">
+                <a16:creationId xmlns:a16="http://schemas.microsoft.com/office/drawing/2014/main" id="{28EA0A28-CF7F-EA20-54F6-CBAB13E67176}"/>
+              </a:ext>
+            </a:extLst>
+          </p:cNvPr>
+          <p:cNvPicPr>
+            <a:picLocks noChangeAspect="1"/>
+          </p:cNvPicPr>
           <p:nvPr/>
-        </p:nvSpPr>
-        <p:spPr>
-          <a:xfrm>
-            <a:off x="8686800" y="1097280"/>
-            <a:ext cx="2743200" cy="4754880"/>
-          </a:xfrm>
-          <a:prstGeom prst="roundRect">
+        </p:nvPicPr>
+        <p:blipFill>
+          <a:blip r:embed="rId2"/>
+          <a:stretch>
+            <a:fillRect/>
+          </a:stretch>
+        </p:blipFill>
+        <p:spPr>
+          <a:xfrm>
+            <a:off x="7218947" y="1599320"/>
+            <a:ext cx="3337814" cy="3337814"/>
+          </a:xfrm>
+          <a:prstGeom prst="rect">
             <a:avLst/>
           </a:prstGeom>
-          <a:solidFill>
-            <a:srgbClr val="6366F1"/>
-          </a:solidFill>
-          <a:ln>
-            <a:noFill/>
-          </a:ln>
-        </p:spPr>
-        <p:style>
-          <a:lnRef idx="1">
-            <a:schemeClr val="accent1"/>
-          </a:lnRef>
-          <a:fillRef idx="3">
-            <a:schemeClr val="accent1"/>
-          </a:fillRef>
-          <a:effectRef idx="2">
-            <a:schemeClr val="accent1"/>
-          </a:effectRef>
-          <a:fontRef idx="minor">
-            <a:schemeClr val="lt1"/>
-          </a:fontRef>
-        </p:style>
-        <p:txBody>
-          <a:bodyPr rtlCol="0" anchor="ctr"/>
-          <a:lstStyle/>
-          <a:p>
-            <a:pPr algn="ctr">
-              <a:defRPr sz="3400"/>
-            </a:pPr>
-            <a:r>
-              <a:t>📚</a:t>
-            </a:r>
-            <a:br/>
-            <a:endParaRPr/>
-          </a:p>
-          <a:p>
-            <a:pPr algn="ctr">
-              <a:defRPr sz="2000">
-                <a:solidFill>
-                  <a:srgbClr val="FFFFFF"/>
-                </a:solidFill>
-              </a:defRPr>
-            </a:pPr>
-            <a:r>
-              <a:t>Canva-style</a:t>
-            </a:r>
-            <a:br/>
-            <a:r>
-              <a:t>visual area</a:t>
-            </a:r>
-          </a:p>
-        </p:txBody>
-      </p:sp>
+        </p:spPr>
+      </p:pic>
     </p:spTree>
   </p:cSld>
   <p:clrMapOvr>
@@ -4883,52 +5225,6 @@
       </p:sp>
       <p:sp>
         <p:nvSpPr>
-          <p:cNvPr id="6" name="Rounded Rectangle 5"/>
-          <p:cNvSpPr/>
-          <p:nvPr/>
-        </p:nvSpPr>
-        <p:spPr>
-          <a:xfrm>
-            <a:off x="548640" y="914400"/>
-            <a:ext cx="7680960" cy="5303520"/>
-          </a:xfrm>
-          <a:prstGeom prst="roundRect">
-            <a:avLst/>
-          </a:prstGeom>
-          <a:solidFill>
-            <a:srgbClr val="FFFFFF"/>
-          </a:solidFill>
-          <a:ln>
-            <a:solidFill>
-              <a:srgbClr val="E1E4EB"/>
-            </a:solidFill>
-          </a:ln>
-        </p:spPr>
-        <p:style>
-          <a:lnRef idx="1">
-            <a:schemeClr val="accent1"/>
-          </a:lnRef>
-          <a:fillRef idx="3">
-            <a:schemeClr val="accent1"/>
-          </a:fillRef>
-          <a:effectRef idx="2">
-            <a:schemeClr val="accent1"/>
-          </a:effectRef>
-          <a:fontRef idx="minor">
-            <a:schemeClr val="lt1"/>
-          </a:fontRef>
-        </p:style>
-        <p:txBody>
-          <a:bodyPr rtlCol="0" anchor="ctr"/>
-          <a:lstStyle/>
-          <a:p>
-            <a:pPr algn="ctr"/>
-            <a:endParaRPr/>
-          </a:p>
-        </p:txBody>
-      </p:sp>
-      <p:sp>
-        <p:nvSpPr>
           <p:cNvPr id="7" name="TextBox 6"/>
           <p:cNvSpPr txBox="1"/>
           <p:nvPr/>
@@ -4998,72 +5294,66 @@
           </a:p>
         </p:txBody>
       </p:sp>
-      <p:sp>
-        <p:nvSpPr>
-          <p:cNvPr id="8" name="Rounded Rectangle 7"/>
-          <p:cNvSpPr/>
+      <p:pic>
+        <p:nvPicPr>
+          <p:cNvPr id="13" name="Picture 12" descr="Yazılım Lisans Tipleri ve Repository’e Lisans Ekleme - DEV Community">
+            <a:extLst>
+              <a:ext uri="{FF2B5EF4-FFF2-40B4-BE49-F238E27FC236}">
+                <a16:creationId xmlns:a16="http://schemas.microsoft.com/office/drawing/2014/main" id="{CE614E04-ADF1-5DF8-35CE-E5776F1CAB8F}"/>
+              </a:ext>
+            </a:extLst>
+          </p:cNvPr>
+          <p:cNvPicPr>
+            <a:picLocks noChangeAspect="1"/>
+          </p:cNvPicPr>
           <p:nvPr/>
-        </p:nvSpPr>
-        <p:spPr>
-          <a:xfrm>
-            <a:off x="8686800" y="1097280"/>
-            <a:ext cx="2743200" cy="4754880"/>
-          </a:xfrm>
-          <a:prstGeom prst="roundRect">
+        </p:nvPicPr>
+        <p:blipFill>
+          <a:blip r:embed="rId2"/>
+          <a:stretch>
+            <a:fillRect/>
+          </a:stretch>
+        </p:blipFill>
+        <p:spPr>
+          <a:xfrm>
+            <a:off x="5925716" y="2002323"/>
+            <a:ext cx="2323979" cy="976071"/>
+          </a:xfrm>
+          <a:prstGeom prst="rect">
             <a:avLst/>
           </a:prstGeom>
-          <a:solidFill>
-            <a:srgbClr val="EC4899"/>
-          </a:solidFill>
-          <a:ln>
-            <a:noFill/>
-          </a:ln>
-        </p:spPr>
-        <p:style>
-          <a:lnRef idx="1">
-            <a:schemeClr val="accent1"/>
-          </a:lnRef>
-          <a:fillRef idx="3">
-            <a:schemeClr val="accent1"/>
-          </a:fillRef>
-          <a:effectRef idx="2">
-            <a:schemeClr val="accent1"/>
-          </a:effectRef>
-          <a:fontRef idx="minor">
-            <a:schemeClr val="lt1"/>
-          </a:fontRef>
-        </p:style>
-        <p:txBody>
-          <a:bodyPr rtlCol="0" anchor="ctr"/>
-          <a:lstStyle/>
-          <a:p>
-            <a:pPr algn="ctr">
-              <a:defRPr sz="3400"/>
-            </a:pPr>
-            <a:r>
-              <a:t>⚙️</a:t>
-            </a:r>
-            <a:br/>
-            <a:endParaRPr/>
-          </a:p>
-          <a:p>
-            <a:pPr algn="ctr">
-              <a:defRPr sz="2000">
-                <a:solidFill>
-                  <a:srgbClr val="FFFFFF"/>
-                </a:solidFill>
-              </a:defRPr>
-            </a:pPr>
-            <a:r>
-              <a:t>Canva-style</a:t>
-            </a:r>
-            <a:br/>
-            <a:r>
-              <a:t>visual area</a:t>
-            </a:r>
-          </a:p>
-        </p:txBody>
-      </p:sp>
+        </p:spPr>
+      </p:pic>
+      <p:pic>
+        <p:nvPicPr>
+          <p:cNvPr id="14" name="Picture 13" descr="Chat GPT logo PNG symbol with transparent background - download chatgpt app logos">
+            <a:extLst>
+              <a:ext uri="{FF2B5EF4-FFF2-40B4-BE49-F238E27FC236}">
+                <a16:creationId xmlns:a16="http://schemas.microsoft.com/office/drawing/2014/main" id="{95C8AF95-2706-B885-A4AC-DE466BDD43BE}"/>
+              </a:ext>
+            </a:extLst>
+          </p:cNvPr>
+          <p:cNvPicPr>
+            <a:picLocks noChangeAspect="1"/>
+          </p:cNvPicPr>
+          <p:nvPr/>
+        </p:nvPicPr>
+        <p:blipFill>
+          <a:blip r:embed="rId3"/>
+          <a:stretch>
+            <a:fillRect/>
+          </a:stretch>
+        </p:blipFill>
+        <p:spPr>
+          <a:xfrm>
+            <a:off x="8249695" y="3717889"/>
+            <a:ext cx="3594885" cy="2046319"/>
+          </a:xfrm>
+          <a:prstGeom prst="rect">
+            <a:avLst/>
+          </a:prstGeom>
+        </p:spPr>
+      </p:pic>
     </p:spTree>
   </p:cSld>
   <p:clrMapOvr>
@@ -5273,7 +5563,7 @@
         <p:spPr>
           <a:xfrm>
             <a:off x="548640" y="914400"/>
-            <a:ext cx="7680960" cy="5303520"/>
+            <a:ext cx="11640312" cy="5303520"/>
           </a:xfrm>
           <a:prstGeom prst="roundRect">
             <a:avLst/>
@@ -5354,73 +5644,7 @@
             </a:pPr>
             <a:r>
               <a:rPr dirty="0"/>
-              <a:t>1. Your prompt</a:t>
-            </a:r>
-          </a:p>
-        </p:txBody>
-      </p:sp>
-      <p:sp>
-        <p:nvSpPr>
-          <p:cNvPr id="8" name="Rounded Rectangle 7"/>
-          <p:cNvSpPr/>
-          <p:nvPr/>
-        </p:nvSpPr>
-        <p:spPr>
-          <a:xfrm>
-            <a:off x="8686800" y="1097280"/>
-            <a:ext cx="2743200" cy="4754880"/>
-          </a:xfrm>
-          <a:prstGeom prst="roundRect">
-            <a:avLst/>
-          </a:prstGeom>
-          <a:solidFill>
-            <a:srgbClr val="10B981"/>
-          </a:solidFill>
-          <a:ln>
-            <a:noFill/>
-          </a:ln>
-        </p:spPr>
-        <p:style>
-          <a:lnRef idx="1">
-            <a:schemeClr val="accent1"/>
-          </a:lnRef>
-          <a:fillRef idx="3">
-            <a:schemeClr val="accent1"/>
-          </a:fillRef>
-          <a:effectRef idx="2">
-            <a:schemeClr val="accent1"/>
-          </a:effectRef>
-          <a:fontRef idx="minor">
-            <a:schemeClr val="lt1"/>
-          </a:fontRef>
-        </p:style>
-        <p:txBody>
-          <a:bodyPr rtlCol="0" anchor="ctr"/>
-          <a:lstStyle/>
-          <a:p>
-            <a:pPr algn="ctr">
-              <a:defRPr sz="3400"/>
-            </a:pPr>
-            <a:r>
-              <a:t>📸</a:t>
-            </a:r>
-            <a:br/>
-            <a:endParaRPr/>
-          </a:p>
-          <a:p>
-            <a:pPr algn="ctr">
-              <a:defRPr sz="2000">
-                <a:solidFill>
-                  <a:srgbClr val="FFFFFF"/>
-                </a:solidFill>
-              </a:defRPr>
-            </a:pPr>
-            <a:r>
-              <a:t>Canva-style</a:t>
-            </a:r>
-            <a:br/>
-            <a:r>
-              <a:t>visual area</a:t>
+              <a:t>1. prompt</a:t>
             </a:r>
           </a:p>
         </p:txBody>
@@ -5447,8 +5671,8 @@
         </p:blipFill>
         <p:spPr>
           <a:xfrm>
-            <a:off x="1328682" y="1819466"/>
-            <a:ext cx="6120876" cy="4271079"/>
+            <a:off x="2805788" y="1143000"/>
+            <a:ext cx="8349891" cy="4879719"/>
           </a:xfrm>
           <a:prstGeom prst="rect">
             <a:avLst/>
@@ -5568,6 +5792,232 @@
 <file path=ppt/slides/slide8.xml><?xml version="1.0" encoding="utf-8"?>
 <p:sld xmlns:a="http://schemas.openxmlformats.org/drawingml/2006/main" xmlns:r="http://schemas.openxmlformats.org/officeDocument/2006/relationships" xmlns:p="http://schemas.openxmlformats.org/presentationml/2006/main">
   <p:cSld>
+    <p:spTree>
+      <p:nvGrpSpPr>
+        <p:cNvPr id="1" name=""/>
+        <p:cNvGrpSpPr/>
+        <p:nvPr/>
+      </p:nvGrpSpPr>
+      <p:grpSpPr>
+        <a:xfrm>
+          <a:off x="0" y="0"/>
+          <a:ext cx="0" cy="0"/>
+          <a:chOff x="0" y="0"/>
+          <a:chExt cx="0" cy="0"/>
+        </a:xfrm>
+      </p:grpSpPr>
+      <p:sp>
+        <p:nvSpPr>
+          <p:cNvPr id="7" name="Rounded Rectangle 7">
+            <a:extLst>
+              <a:ext uri="{FF2B5EF4-FFF2-40B4-BE49-F238E27FC236}">
+                <a16:creationId xmlns:a16="http://schemas.microsoft.com/office/drawing/2014/main" id="{1716A845-5864-5D08-EFD9-D1263C6C2C28}"/>
+              </a:ext>
+            </a:extLst>
+          </p:cNvPr>
+          <p:cNvSpPr/>
+          <p:nvPr/>
+        </p:nvSpPr>
+        <p:spPr>
+          <a:xfrm>
+            <a:off x="-241159" y="0"/>
+            <a:ext cx="12530293" cy="783771"/>
+          </a:xfrm>
+          <a:prstGeom prst="roundRect">
+            <a:avLst>
+              <a:gd name="adj" fmla="val 50000"/>
+            </a:avLst>
+          </a:prstGeom>
+          <a:solidFill>
+            <a:srgbClr val="6366F1"/>
+          </a:solidFill>
+          <a:ln>
+            <a:noFill/>
+          </a:ln>
+        </p:spPr>
+        <p:style>
+          <a:lnRef idx="1">
+            <a:schemeClr val="accent1"/>
+          </a:lnRef>
+          <a:fillRef idx="3">
+            <a:schemeClr val="accent1"/>
+          </a:fillRef>
+          <a:effectRef idx="2">
+            <a:schemeClr val="accent1"/>
+          </a:effectRef>
+          <a:fontRef idx="minor">
+            <a:schemeClr val="lt1"/>
+          </a:fontRef>
+        </p:style>
+        <p:txBody>
+          <a:bodyPr rtlCol="0" anchor="ctr"/>
+          <a:lstStyle/>
+          <a:p>
+            <a:pPr algn="ctr">
+              <a:defRPr sz="2000">
+                <a:solidFill>
+                  <a:srgbClr val="FFFFFF"/>
+                </a:solidFill>
+              </a:defRPr>
+            </a:pPr>
+            <a:br>
+              <a:rPr dirty="0"/>
+            </a:br>
+            <a:endParaRPr dirty="0"/>
+          </a:p>
+        </p:txBody>
+      </p:sp>
+      <p:sp>
+        <p:nvSpPr>
+          <p:cNvPr id="9" name="TextBox 8">
+            <a:extLst>
+              <a:ext uri="{FF2B5EF4-FFF2-40B4-BE49-F238E27FC236}">
+                <a16:creationId xmlns:a16="http://schemas.microsoft.com/office/drawing/2014/main" id="{EB954678-25D5-5CD1-1A68-EDA21E8B9D5C}"/>
+              </a:ext>
+            </a:extLst>
+          </p:cNvPr>
+          <p:cNvSpPr txBox="1"/>
+          <p:nvPr/>
+        </p:nvSpPr>
+        <p:spPr>
+          <a:xfrm>
+            <a:off x="150725" y="0"/>
+            <a:ext cx="9093758" cy="523220"/>
+          </a:xfrm>
+          <a:prstGeom prst="rect">
+            <a:avLst/>
+          </a:prstGeom>
+          <a:noFill/>
+        </p:spPr>
+        <p:txBody>
+          <a:bodyPr wrap="square">
+            <a:spAutoFit/>
+          </a:bodyPr>
+          <a:lstStyle/>
+          <a:p>
+            <a:r>
+              <a:rPr lang="en-IN" sz="2800" dirty="0"/>
+              <a:t>Git Hub Repository</a:t>
+            </a:r>
+          </a:p>
+        </p:txBody>
+      </p:sp>
+      <p:pic>
+        <p:nvPicPr>
+          <p:cNvPr id="11" name="Picture 10">
+            <a:extLst>
+              <a:ext uri="{FF2B5EF4-FFF2-40B4-BE49-F238E27FC236}">
+                <a16:creationId xmlns:a16="http://schemas.microsoft.com/office/drawing/2014/main" id="{9736CAC5-B88D-447C-C08F-582EAF93D066}"/>
+              </a:ext>
+            </a:extLst>
+          </p:cNvPr>
+          <p:cNvPicPr>
+            <a:picLocks noChangeAspect="1"/>
+          </p:cNvPicPr>
+          <p:nvPr/>
+        </p:nvPicPr>
+        <p:blipFill>
+          <a:blip r:embed="rId2"/>
+          <a:stretch>
+            <a:fillRect/>
+          </a:stretch>
+        </p:blipFill>
+        <p:spPr>
+          <a:xfrm>
+            <a:off x="592853" y="2642715"/>
+            <a:ext cx="10347789" cy="3808325"/>
+          </a:xfrm>
+          <a:prstGeom prst="rect">
+            <a:avLst/>
+          </a:prstGeom>
+        </p:spPr>
+      </p:pic>
+      <p:sp>
+        <p:nvSpPr>
+          <p:cNvPr id="13" name="TextBox 12">
+            <a:extLst>
+              <a:ext uri="{FF2B5EF4-FFF2-40B4-BE49-F238E27FC236}">
+                <a16:creationId xmlns:a16="http://schemas.microsoft.com/office/drawing/2014/main" id="{9CD57912-21BE-A03E-2FE9-7D641CC7D75A}"/>
+              </a:ext>
+            </a:extLst>
+          </p:cNvPr>
+          <p:cNvSpPr txBox="1"/>
+          <p:nvPr/>
+        </p:nvSpPr>
+        <p:spPr>
+          <a:xfrm rot="10800000" flipV="1">
+            <a:off x="1517301" y="1688123"/>
+            <a:ext cx="7659355" cy="369332"/>
+          </a:xfrm>
+          <a:prstGeom prst="rect">
+            <a:avLst/>
+          </a:prstGeom>
+          <a:noFill/>
+        </p:spPr>
+        <p:txBody>
+          <a:bodyPr wrap="square">
+            <a:spAutoFit/>
+          </a:bodyPr>
+          <a:lstStyle/>
+          <a:p>
+            <a:r>
+              <a:rPr lang="en-IN" dirty="0"/>
+              <a:t>https://github.com/vaishnavipanchal9/story-Idea-Generator..git</a:t>
+            </a:r>
+          </a:p>
+        </p:txBody>
+      </p:sp>
+      <p:sp>
+        <p:nvSpPr>
+          <p:cNvPr id="15" name="TextBox 14">
+            <a:extLst>
+              <a:ext uri="{FF2B5EF4-FFF2-40B4-BE49-F238E27FC236}">
+                <a16:creationId xmlns:a16="http://schemas.microsoft.com/office/drawing/2014/main" id="{C710D4E8-A5F5-9AF8-6A9D-2D978214A430}"/>
+              </a:ext>
+            </a:extLst>
+          </p:cNvPr>
+          <p:cNvSpPr txBox="1"/>
+          <p:nvPr/>
+        </p:nvSpPr>
+        <p:spPr>
+          <a:xfrm>
+            <a:off x="592853" y="1318790"/>
+            <a:ext cx="6305340" cy="369332"/>
+          </a:xfrm>
+          <a:prstGeom prst="rect">
+            <a:avLst/>
+          </a:prstGeom>
+          <a:noFill/>
+        </p:spPr>
+        <p:txBody>
+          <a:bodyPr wrap="square">
+            <a:spAutoFit/>
+          </a:bodyPr>
+          <a:lstStyle/>
+          <a:p>
+            <a:r>
+              <a:rPr lang="en-IN" dirty="0"/>
+              <a:t>Git repository link:</a:t>
+            </a:r>
+          </a:p>
+        </p:txBody>
+      </p:sp>
+    </p:spTree>
+    <p:extLst>
+      <p:ext uri="{BB962C8B-B14F-4D97-AF65-F5344CB8AC3E}">
+        <p14:creationId xmlns:p14="http://schemas.microsoft.com/office/powerpoint/2010/main" val="1957461987"/>
+      </p:ext>
+    </p:extLst>
+  </p:cSld>
+  <p:clrMapOvr>
+    <a:masterClrMapping/>
+  </p:clrMapOvr>
+</p:sld>
+</file>
+
+<file path=ppt/slides/slide9.xml><?xml version="1.0" encoding="utf-8"?>
+<p:sld xmlns:a="http://schemas.openxmlformats.org/drawingml/2006/main" xmlns:r="http://schemas.openxmlformats.org/officeDocument/2006/relationships" xmlns:p="http://schemas.openxmlformats.org/presentationml/2006/main">
+  <p:cSld>
     <p:bg>
       <p:bgPr>
         <a:solidFill>
@@ -5765,8 +6215,8 @@
         </p:nvSpPr>
         <p:spPr>
           <a:xfrm>
-            <a:off x="548640" y="914400"/>
-            <a:ext cx="7680960" cy="5303520"/>
+            <a:off x="548640" y="822960"/>
+            <a:ext cx="11569672" cy="5394960"/>
           </a:xfrm>
           <a:prstGeom prst="roundRect">
             <a:avLst/>
@@ -5838,139 +6288,7 @@
           </a:p>
         </p:txBody>
       </p:sp>
-      <p:sp>
-        <p:nvSpPr>
-          <p:cNvPr id="8" name="Rounded Rectangle 7"/>
-          <p:cNvSpPr/>
-          <p:nvPr/>
-        </p:nvSpPr>
-        <p:spPr>
-          <a:xfrm>
-            <a:off x="8686800" y="1097280"/>
-            <a:ext cx="2743200" cy="4754880"/>
-          </a:xfrm>
-          <a:prstGeom prst="roundRect">
-            <a:avLst/>
-          </a:prstGeom>
-          <a:solidFill>
-            <a:srgbClr val="6366F1"/>
-          </a:solidFill>
-          <a:ln>
-            <a:noFill/>
-          </a:ln>
-        </p:spPr>
-        <p:style>
-          <a:lnRef idx="1">
-            <a:schemeClr val="accent1"/>
-          </a:lnRef>
-          <a:fillRef idx="3">
-            <a:schemeClr val="accent1"/>
-          </a:fillRef>
-          <a:effectRef idx="2">
-            <a:schemeClr val="accent1"/>
-          </a:effectRef>
-          <a:fontRef idx="minor">
-            <a:schemeClr val="lt1"/>
-          </a:fontRef>
-        </p:style>
-        <p:txBody>
-          <a:bodyPr rtlCol="0" anchor="ctr"/>
-          <a:lstStyle/>
-          <a:p>
-            <a:pPr algn="ctr">
-              <a:defRPr sz="3400"/>
-            </a:pPr>
-            <a:r>
-              <a:t>🎉</a:t>
-            </a:r>
-            <a:br/>
-            <a:endParaRPr/>
-          </a:p>
-          <a:p>
-            <a:pPr algn="ctr">
-              <a:defRPr sz="2000">
-                <a:solidFill>
-                  <a:srgbClr val="FFFFFF"/>
-                </a:solidFill>
-              </a:defRPr>
-            </a:pPr>
-            <a:r>
-              <a:t>Canva-style</a:t>
-            </a:r>
-            <a:br/>
-            <a:r>
-              <a:t>visual area</a:t>
-            </a:r>
-          </a:p>
-        </p:txBody>
-      </p:sp>
     </p:spTree>
-  </p:cSld>
-  <p:clrMapOvr>
-    <a:masterClrMapping/>
-  </p:clrMapOvr>
-</p:sld>
-</file>
-
-<file path=ppt/slides/slide9.xml><?xml version="1.0" encoding="utf-8"?>
-<p:sld xmlns:a="http://schemas.openxmlformats.org/drawingml/2006/main" xmlns:r="http://schemas.openxmlformats.org/officeDocument/2006/relationships" xmlns:p="http://schemas.openxmlformats.org/presentationml/2006/main">
-  <p:cSld>
-    <p:spTree>
-      <p:nvGrpSpPr>
-        <p:cNvPr id="1" name=""/>
-        <p:cNvGrpSpPr/>
-        <p:nvPr/>
-      </p:nvGrpSpPr>
-      <p:grpSpPr>
-        <a:xfrm>
-          <a:off x="0" y="0"/>
-          <a:ext cx="0" cy="0"/>
-          <a:chOff x="0" y="0"/>
-          <a:chExt cx="0" cy="0"/>
-        </a:xfrm>
-      </p:grpSpPr>
-      <p:pic>
-        <p:nvPicPr>
-          <p:cNvPr id="3" name="Picture 2">
-            <a:extLst>
-              <a:ext uri="{FF2B5EF4-FFF2-40B4-BE49-F238E27FC236}">
-                <a16:creationId xmlns:a16="http://schemas.microsoft.com/office/drawing/2014/main" id="{ACCAABB1-512A-55D8-85AD-A84F02C3E481}"/>
-              </a:ext>
-            </a:extLst>
-          </p:cNvPr>
-          <p:cNvPicPr>
-            <a:picLocks noChangeAspect="1"/>
-          </p:cNvPicPr>
-          <p:nvPr/>
-        </p:nvPicPr>
-        <p:blipFill>
-          <a:blip r:embed="rId2">
-            <a:extLst>
-              <a:ext uri="{837473B0-CC2E-450A-ABE3-18F120FF3D39}">
-                <a1611:picAttrSrcUrl xmlns:a1611="http://schemas.microsoft.com/office/drawing/2016/11/main" r:id="rId3"/>
-              </a:ext>
-            </a:extLst>
-          </a:blip>
-          <a:stretch>
-            <a:fillRect/>
-          </a:stretch>
-        </p:blipFill>
-        <p:spPr>
-          <a:xfrm>
-            <a:off x="950912" y="0"/>
-            <a:ext cx="10287000" cy="6858000"/>
-          </a:xfrm>
-          <a:prstGeom prst="rect">
-            <a:avLst/>
-          </a:prstGeom>
-        </p:spPr>
-      </p:pic>
-    </p:spTree>
-    <p:extLst>
-      <p:ext uri="{BB962C8B-B14F-4D97-AF65-F5344CB8AC3E}">
-        <p14:creationId xmlns:p14="http://schemas.microsoft.com/office/powerpoint/2010/main" val="1219376980"/>
-      </p:ext>
-    </p:extLst>
   </p:cSld>
   <p:clrMapOvr>
     <a:masterClrMapping/>
